--- a/ppt/first review.pptx
+++ b/ppt/first review.pptx
@@ -19,17 +19,18 @@
     <p:sldId id="264" r:id="rId13"/>
     <p:sldId id="273" r:id="rId14"/>
     <p:sldId id="279" r:id="rId15"/>
-    <p:sldId id="280" r:id="rId16"/>
-    <p:sldId id="281" r:id="rId17"/>
-    <p:sldId id="282" r:id="rId18"/>
-    <p:sldId id="283" r:id="rId19"/>
-    <p:sldId id="284" r:id="rId20"/>
-    <p:sldId id="285" r:id="rId21"/>
-    <p:sldId id="287" r:id="rId22"/>
-    <p:sldId id="268" r:id="rId23"/>
-    <p:sldId id="269" r:id="rId24"/>
-    <p:sldId id="270" r:id="rId25"/>
-    <p:sldId id="274" r:id="rId26"/>
+    <p:sldId id="291" r:id="rId16"/>
+    <p:sldId id="280" r:id="rId17"/>
+    <p:sldId id="281" r:id="rId18"/>
+    <p:sldId id="282" r:id="rId19"/>
+    <p:sldId id="283" r:id="rId20"/>
+    <p:sldId id="284" r:id="rId21"/>
+    <p:sldId id="285" r:id="rId22"/>
+    <p:sldId id="287" r:id="rId23"/>
+    <p:sldId id="268" r:id="rId24"/>
+    <p:sldId id="269" r:id="rId25"/>
+    <p:sldId id="270" r:id="rId26"/>
+    <p:sldId id="274" r:id="rId27"/>
   </p:sldIdLst>
   <p:sldSz cx="4610100" cy="3460750"/>
   <p:notesSz cx="4610100" cy="3460750"/>
@@ -208,7 +209,7 @@
           <a:p>
             <a:fld id="{1D8BD707-D9CF-40AE-B4C6-C98DA3205C09}" type="datetimeFigureOut">
               <a:rPr lang="en-US"/>
-              <a:t>2/9/2026</a:t>
+              <a:t>3/11/2026</a:t>
             </a:fld>
             <a:endParaRPr lang="en-US"/>
           </a:p>
@@ -385,7 +386,7 @@
           <a:p>
             <a:fld id="{1D8BD707-D9CF-40AE-B4C6-C98DA3205C09}" type="datetimeFigureOut">
               <a:rPr lang="en-US"/>
-              <a:t>2/9/2026</a:t>
+              <a:t>3/11/2026</a:t>
             </a:fld>
             <a:endParaRPr lang="en-US"/>
           </a:p>
@@ -599,7 +600,7 @@
           <a:p>
             <a:fld id="{1D8BD707-D9CF-40AE-B4C6-C98DA3205C09}" type="datetimeFigureOut">
               <a:rPr lang="en-US"/>
-              <a:t>2/9/2026</a:t>
+              <a:t>3/11/2026</a:t>
             </a:fld>
             <a:endParaRPr lang="en-US"/>
           </a:p>
@@ -747,7 +748,7 @@
           <a:p>
             <a:fld id="{1D8BD707-D9CF-40AE-B4C6-C98DA3205C09}" type="datetimeFigureOut">
               <a:rPr lang="en-US"/>
-              <a:t>2/9/2026</a:t>
+              <a:t>3/11/2026</a:t>
             </a:fld>
             <a:endParaRPr lang="en-US"/>
           </a:p>
@@ -866,7 +867,7 @@
           <a:p>
             <a:fld id="{1D8BD707-D9CF-40AE-B4C6-C98DA3205C09}" type="datetimeFigureOut">
               <a:rPr lang="en-US"/>
-              <a:t>2/9/2026</a:t>
+              <a:t>3/11/2026</a:t>
             </a:fld>
             <a:endParaRPr lang="en-US"/>
           </a:p>
@@ -1091,7 +1092,7 @@
           <a:p>
             <a:fld id="{1D8BD707-D9CF-40AE-B4C6-C98DA3205C09}" type="datetimeFigureOut">
               <a:rPr lang="en-US"/>
-              <a:t>2/9/2026</a:t>
+              <a:t>3/11/2026</a:t>
             </a:fld>
             <a:endParaRPr lang="en-US"/>
           </a:p>
@@ -2899,7 +2900,7 @@
         <p:spPr>
           <a:xfrm>
             <a:off x="1518577" y="413957"/>
-            <a:ext cx="937835" cy="2808000"/>
+            <a:ext cx="1243673" cy="2808000"/>
           </a:xfrm>
           <a:prstGeom prst="rect">
             <a:avLst/>
@@ -3057,7 +3058,7 @@
             <a:bodyPr wrap="square" lIns="0" tIns="0" rIns="0" bIns="0" rtlCol="0"/>
             <a:lstStyle/>
             <a:p>
-              <a:endParaRPr/>
+              <a:endParaRPr dirty="0"/>
             </a:p>
           </p:txBody>
         </p:sp>
@@ -3211,6 +3212,257 @@
 </file>
 
 <file path=ppt/slides/slide15.xml><?xml version="1.0" encoding="utf-8"?>
+<p:sld xmlns:a="http://schemas.openxmlformats.org/drawingml/2006/main" xmlns:r="http://schemas.openxmlformats.org/officeDocument/2006/relationships" xmlns:p="http://schemas.openxmlformats.org/presentationml/2006/main">
+  <p:cSld>
+    <p:spTree>
+      <p:nvGrpSpPr>
+        <p:cNvPr id="1" name=""/>
+        <p:cNvGrpSpPr/>
+        <p:nvPr/>
+      </p:nvGrpSpPr>
+      <p:grpSpPr>
+        <a:xfrm>
+          <a:off x="0" y="0"/>
+          <a:ext cx="0" cy="0"/>
+          <a:chOff x="0" y="0"/>
+          <a:chExt cx="0" cy="0"/>
+        </a:xfrm>
+      </p:grpSpPr>
+      <p:grpSp>
+        <p:nvGrpSpPr>
+          <p:cNvPr id="2" name="object 4">
+            <a:extLst>
+              <a:ext uri="{FF2B5EF4-FFF2-40B4-BE49-F238E27FC236}">
+                <a16:creationId xmlns:a16="http://schemas.microsoft.com/office/drawing/2014/main" id="{0AA8E3D7-F6E6-5B58-8BBF-AD0E81203665}"/>
+              </a:ext>
+            </a:extLst>
+          </p:cNvPr>
+          <p:cNvGrpSpPr/>
+          <p:nvPr/>
+        </p:nvGrpSpPr>
+        <p:grpSpPr>
+          <a:xfrm>
+            <a:off x="-5071" y="324420"/>
+            <a:ext cx="2890520" cy="46355"/>
+            <a:chOff x="-5071" y="324420"/>
+            <a:chExt cx="2890520" cy="46355"/>
+          </a:xfrm>
+        </p:grpSpPr>
+        <p:sp>
+          <p:nvSpPr>
+            <p:cNvPr id="3" name="object 5">
+              <a:extLst>
+                <a:ext uri="{FF2B5EF4-FFF2-40B4-BE49-F238E27FC236}">
+                  <a16:creationId xmlns:a16="http://schemas.microsoft.com/office/drawing/2014/main" id="{6226C28E-F2AD-27FA-AABF-6477DA3D1D54}"/>
+                </a:ext>
+              </a:extLst>
+            </p:cNvPr>
+            <p:cNvSpPr/>
+            <p:nvPr/>
+          </p:nvSpPr>
+          <p:spPr>
+            <a:xfrm>
+              <a:off x="-10" y="329481"/>
+              <a:ext cx="2880360" cy="36195"/>
+            </a:xfrm>
+            <a:custGeom>
+              <a:avLst/>
+              <a:gdLst/>
+              <a:ahLst/>
+              <a:cxnLst/>
+              <a:rect l="l" t="t" r="r" b="b"/>
+              <a:pathLst>
+                <a:path w="2880360" h="36195">
+                  <a:moveTo>
+                    <a:pt x="2880035" y="0"/>
+                  </a:moveTo>
+                  <a:lnTo>
+                    <a:pt x="0" y="0"/>
+                  </a:lnTo>
+                  <a:lnTo>
+                    <a:pt x="0" y="36002"/>
+                  </a:lnTo>
+                  <a:lnTo>
+                    <a:pt x="2880035" y="0"/>
+                  </a:lnTo>
+                  <a:close/>
+                </a:path>
+              </a:pathLst>
+            </a:custGeom>
+            <a:solidFill>
+              <a:srgbClr val="FF7F00"/>
+            </a:solidFill>
+          </p:spPr>
+          <p:txBody>
+            <a:bodyPr wrap="square" lIns="0" tIns="0" rIns="0" bIns="0" rtlCol="0"/>
+            <a:lstStyle/>
+            <a:p>
+              <a:endParaRPr/>
+            </a:p>
+          </p:txBody>
+        </p:sp>
+        <p:sp>
+          <p:nvSpPr>
+            <p:cNvPr id="4" name="object 6">
+              <a:extLst>
+                <a:ext uri="{FF2B5EF4-FFF2-40B4-BE49-F238E27FC236}">
+                  <a16:creationId xmlns:a16="http://schemas.microsoft.com/office/drawing/2014/main" id="{4F92C4F7-C573-B5C6-0F57-CD58D3A1C65B}"/>
+                </a:ext>
+              </a:extLst>
+            </p:cNvPr>
+            <p:cNvSpPr/>
+            <p:nvPr/>
+          </p:nvSpPr>
+          <p:spPr>
+            <a:xfrm>
+              <a:off x="-10" y="329481"/>
+              <a:ext cx="2880360" cy="36195"/>
+            </a:xfrm>
+            <a:custGeom>
+              <a:avLst/>
+              <a:gdLst/>
+              <a:ahLst/>
+              <a:cxnLst/>
+              <a:rect l="l" t="t" r="r" b="b"/>
+              <a:pathLst>
+                <a:path w="2880360" h="36195">
+                  <a:moveTo>
+                    <a:pt x="0" y="0"/>
+                  </a:moveTo>
+                  <a:lnTo>
+                    <a:pt x="2880035" y="0"/>
+                  </a:lnTo>
+                  <a:lnTo>
+                    <a:pt x="0" y="36002"/>
+                  </a:lnTo>
+                  <a:lnTo>
+                    <a:pt x="0" y="0"/>
+                  </a:lnTo>
+                </a:path>
+              </a:pathLst>
+            </a:custGeom>
+            <a:ln w="10122">
+              <a:solidFill>
+                <a:srgbClr val="FF7F00"/>
+              </a:solidFill>
+            </a:ln>
+          </p:spPr>
+          <p:txBody>
+            <a:bodyPr wrap="square" lIns="0" tIns="0" rIns="0" bIns="0" rtlCol="0"/>
+            <a:lstStyle/>
+            <a:p>
+              <a:endParaRPr dirty="0"/>
+            </a:p>
+          </p:txBody>
+        </p:sp>
+      </p:grpSp>
+      <p:sp>
+        <p:nvSpPr>
+          <p:cNvPr id="5" name="object 2">
+            <a:extLst>
+              <a:ext uri="{FF2B5EF4-FFF2-40B4-BE49-F238E27FC236}">
+                <a16:creationId xmlns:a16="http://schemas.microsoft.com/office/drawing/2014/main" id="{F6D11978-8538-3405-255F-BBEB914521FD}"/>
+              </a:ext>
+            </a:extLst>
+          </p:cNvPr>
+          <p:cNvSpPr txBox="1"/>
+          <p:nvPr/>
+        </p:nvSpPr>
+        <p:spPr>
+          <a:xfrm>
+            <a:off x="19050" y="61046"/>
+            <a:ext cx="2999055" cy="232756"/>
+          </a:xfrm>
+          <a:prstGeom prst="rect">
+            <a:avLst/>
+          </a:prstGeom>
+        </p:spPr>
+        <p:txBody>
+          <a:bodyPr vert="horz" wrap="square" lIns="0" tIns="17145" rIns="0" bIns="0" rtlCol="0">
+            <a:spAutoFit/>
+          </a:bodyPr>
+          <a:lstStyle/>
+          <a:p>
+            <a:pPr marL="12700">
+              <a:lnSpc>
+                <a:spcPct val="100000"/>
+              </a:lnSpc>
+              <a:spcBef>
+                <a:spcPts val="135"/>
+              </a:spcBef>
+            </a:pPr>
+            <a:r>
+              <a:rPr lang="en-IN" sz="1400" b="1" dirty="0">
+                <a:solidFill>
+                  <a:schemeClr val="hlink"/>
+                </a:solidFill>
+                <a:latin typeface="Cambria Math" panose="02040503050406030204" pitchFamily="18" charset="0"/>
+                <a:ea typeface="Cambria Math" panose="02040503050406030204" pitchFamily="18" charset="0"/>
+                <a:cs typeface="Calibri"/>
+              </a:rPr>
+              <a:t>Two-Way Communication Pipeline</a:t>
+            </a:r>
+            <a:endParaRPr sz="1400" b="1" dirty="0">
+              <a:solidFill>
+                <a:schemeClr val="hlink"/>
+              </a:solidFill>
+              <a:latin typeface="Cambria Math" panose="02040503050406030204" pitchFamily="18" charset="0"/>
+              <a:ea typeface="Cambria Math" panose="02040503050406030204" pitchFamily="18" charset="0"/>
+              <a:cs typeface="Calibri"/>
+            </a:endParaRPr>
+          </a:p>
+        </p:txBody>
+      </p:sp>
+      <p:pic>
+        <p:nvPicPr>
+          <p:cNvPr id="7" name="Picture 6">
+            <a:extLst>
+              <a:ext uri="{FF2B5EF4-FFF2-40B4-BE49-F238E27FC236}">
+                <a16:creationId xmlns:a16="http://schemas.microsoft.com/office/drawing/2014/main" id="{12C203B6-D771-B465-1A7F-777232EF30BB}"/>
+              </a:ext>
+            </a:extLst>
+          </p:cNvPr>
+          <p:cNvPicPr>
+            <a:picLocks noChangeAspect="1"/>
+          </p:cNvPicPr>
+          <p:nvPr/>
+        </p:nvPicPr>
+        <p:blipFill>
+          <a:blip r:embed="rId2" cstate="print">
+            <a:extLst>
+              <a:ext uri="{28A0092B-C50C-407E-A947-70E740481C1C}">
+                <a14:useLocalDpi xmlns:a14="http://schemas.microsoft.com/office/drawing/2010/main" val="0"/>
+              </a:ext>
+            </a:extLst>
+          </a:blip>
+          <a:stretch>
+            <a:fillRect/>
+          </a:stretch>
+        </p:blipFill>
+        <p:spPr>
+          <a:xfrm>
+            <a:off x="95250" y="511175"/>
+            <a:ext cx="4218749" cy="2812499"/>
+          </a:xfrm>
+          <a:prstGeom prst="rect">
+            <a:avLst/>
+          </a:prstGeom>
+        </p:spPr>
+      </p:pic>
+    </p:spTree>
+    <p:extLst>
+      <p:ext uri="{BB962C8B-B14F-4D97-AF65-F5344CB8AC3E}">
+        <p14:creationId xmlns:p14="http://schemas.microsoft.com/office/powerpoint/2010/main" val="2923414039"/>
+      </p:ext>
+    </p:extLst>
+  </p:cSld>
+  <p:clrMapOvr>
+    <a:masterClrMapping/>
+  </p:clrMapOvr>
+</p:sld>
+</file>
+
+<file path=ppt/slides/slide16.xml><?xml version="1.0" encoding="utf-8"?>
 <p:sld xmlns:a="http://schemas.openxmlformats.org/drawingml/2006/main" xmlns:r="http://schemas.openxmlformats.org/officeDocument/2006/relationships" xmlns:p="http://schemas.openxmlformats.org/presentationml/2006/main">
   <p:cSld>
     <p:spTree>
@@ -3448,7 +3700,7 @@
         </p:nvSpPr>
         <p:spPr>
           <a:xfrm>
-            <a:off x="95250" y="587375"/>
+            <a:off x="95250" y="470519"/>
             <a:ext cx="3276600" cy="430887"/>
           </a:xfrm>
           <a:prstGeom prst="rect">
@@ -3488,8 +3740,8 @@
         </p:nvSpPr>
         <p:spPr bwMode="auto">
           <a:xfrm>
-            <a:off x="171450" y="842475"/>
-            <a:ext cx="3329758" cy="938719"/>
+            <a:off x="171450" y="757837"/>
+            <a:ext cx="3329758" cy="1107996"/>
           </a:xfrm>
           <a:prstGeom prst="rect">
             <a:avLst/>
@@ -3692,11 +3944,78 @@
                 <a:latin typeface="Cambria Math" panose="02040503050406030204" pitchFamily="18" charset="0"/>
                 <a:ea typeface="Cambria Math" panose="02040503050406030204" pitchFamily="18" charset="0"/>
               </a:rPr>
-              <a:t> Labelled gesture samples</a:t>
+              <a:t> Labelled gesture </a:t>
+            </a:r>
+            <a:endParaRPr lang="en-US" altLang="en-US" sz="1100" dirty="0">
+              <a:solidFill>
+                <a:schemeClr val="tx1"/>
+              </a:solidFill>
+              <a:latin typeface="Cambria Math" panose="02040503050406030204" pitchFamily="18" charset="0"/>
+              <a:ea typeface="Cambria Math" panose="02040503050406030204" pitchFamily="18" charset="0"/>
+            </a:endParaRPr>
+          </a:p>
+          <a:p>
+            <a:pPr marL="0" marR="0" lvl="0" indent="0" algn="l" defTabSz="914400" rtl="0" eaLnBrk="0" fontAlgn="base" latinLnBrk="0" hangingPunct="0">
+              <a:lnSpc>
+                <a:spcPct val="100000"/>
+              </a:lnSpc>
+              <a:spcBef>
+                <a:spcPct val="0"/>
+              </a:spcBef>
+              <a:spcAft>
+                <a:spcPct val="0"/>
+              </a:spcAft>
+              <a:buClrTx/>
+              <a:buSzTx/>
+              <a:tabLst/>
+            </a:pPr>
+            <a:r>
+              <a:rPr kumimoji="0" lang="en-US" altLang="en-US" sz="1100" b="0" i="0" u="none" strike="noStrike" cap="none" normalizeH="0" baseline="0" dirty="0">
+                <a:ln>
+                  <a:noFill/>
+                </a:ln>
+                <a:solidFill>
+                  <a:schemeClr val="tx1"/>
+                </a:solidFill>
+                <a:effectLst/>
+                <a:latin typeface="Cambria Math" panose="02040503050406030204" pitchFamily="18" charset="0"/>
+                <a:ea typeface="Cambria Math" panose="02040503050406030204" pitchFamily="18" charset="0"/>
+              </a:rPr>
+              <a:t>   samples</a:t>
             </a:r>
           </a:p>
         </p:txBody>
       </p:sp>
+      <p:pic>
+        <p:nvPicPr>
+          <p:cNvPr id="9" name="Picture 8">
+            <a:extLst>
+              <a:ext uri="{FF2B5EF4-FFF2-40B4-BE49-F238E27FC236}">
+                <a16:creationId xmlns:a16="http://schemas.microsoft.com/office/drawing/2014/main" id="{E9FF4F3F-BCFC-4826-F18E-CCE4696194F9}"/>
+              </a:ext>
+            </a:extLst>
+          </p:cNvPr>
+          <p:cNvPicPr>
+            <a:picLocks noChangeAspect="1"/>
+          </p:cNvPicPr>
+          <p:nvPr/>
+        </p:nvPicPr>
+        <p:blipFill>
+          <a:blip r:embed="rId2"/>
+          <a:stretch>
+            <a:fillRect/>
+          </a:stretch>
+        </p:blipFill>
+        <p:spPr>
+          <a:xfrm>
+            <a:off x="1667038" y="1444926"/>
+            <a:ext cx="2914650" cy="2020469"/>
+          </a:xfrm>
+          <a:prstGeom prst="rect">
+            <a:avLst/>
+          </a:prstGeom>
+        </p:spPr>
+      </p:pic>
     </p:spTree>
     <p:extLst>
       <p:ext uri="{BB962C8B-B14F-4D97-AF65-F5344CB8AC3E}">
@@ -3710,7 +4029,7 @@
 </p:sld>
 </file>
 
-<file path=ppt/slides/slide16.xml><?xml version="1.0" encoding="utf-8"?>
+<file path=ppt/slides/slide17.xml><?xml version="1.0" encoding="utf-8"?>
 <p:sld xmlns:a="http://schemas.openxmlformats.org/drawingml/2006/main" xmlns:r="http://schemas.openxmlformats.org/officeDocument/2006/relationships" xmlns:p="http://schemas.openxmlformats.org/presentationml/2006/main">
   <p:cSld>
     <p:spTree>
@@ -4024,7 +4343,7 @@
 </p:sld>
 </file>
 
-<file path=ppt/slides/slide17.xml><?xml version="1.0" encoding="utf-8"?>
+<file path=ppt/slides/slide18.xml><?xml version="1.0" encoding="utf-8"?>
 <p:sld xmlns:a="http://schemas.openxmlformats.org/drawingml/2006/main" xmlns:r="http://schemas.openxmlformats.org/officeDocument/2006/relationships" xmlns:p="http://schemas.openxmlformats.org/presentationml/2006/main">
   <p:cSld>
     <p:spTree>
@@ -4359,7 +4678,7 @@
 </p:sld>
 </file>
 
-<file path=ppt/slides/slide18.xml><?xml version="1.0" encoding="utf-8"?>
+<file path=ppt/slides/slide19.xml><?xml version="1.0" encoding="utf-8"?>
 <p:sld xmlns:a="http://schemas.openxmlformats.org/drawingml/2006/main" xmlns:r="http://schemas.openxmlformats.org/officeDocument/2006/relationships" xmlns:p="http://schemas.openxmlformats.org/presentationml/2006/main">
   <p:cSld>
     <p:spTree>
@@ -4708,7 +5027,538 @@
 </p:sld>
 </file>
 
-<file path=ppt/slides/slide19.xml><?xml version="1.0" encoding="utf-8"?>
+<file path=ppt/slides/slide2.xml><?xml version="1.0" encoding="utf-8"?>
+<p:sld xmlns:a="http://schemas.openxmlformats.org/drawingml/2006/main" xmlns:r="http://schemas.openxmlformats.org/officeDocument/2006/relationships" xmlns:p="http://schemas.openxmlformats.org/presentationml/2006/main" showMasterSp="0">
+  <p:cSld>
+    <p:spTree>
+      <p:nvGrpSpPr>
+        <p:cNvPr id="1" name=""/>
+        <p:cNvGrpSpPr/>
+        <p:nvPr/>
+      </p:nvGrpSpPr>
+      <p:grpSpPr>
+        <a:xfrm>
+          <a:off x="0" y="0"/>
+          <a:ext cx="0" cy="0"/>
+          <a:chOff x="0" y="0"/>
+          <a:chExt cx="0" cy="0"/>
+        </a:xfrm>
+      </p:grpSpPr>
+      <p:sp>
+        <p:nvSpPr>
+          <p:cNvPr id="2" name="object 2"/>
+          <p:cNvSpPr txBox="1">
+            <a:spLocks noGrp="1"/>
+          </p:cNvSpPr>
+          <p:nvPr>
+            <p:ph type="title"/>
+          </p:nvPr>
+        </p:nvSpPr>
+        <p:spPr>
+          <a:xfrm>
+            <a:off x="144195" y="32852"/>
+            <a:ext cx="1894205" cy="232756"/>
+          </a:xfrm>
+          <a:prstGeom prst="rect">
+            <a:avLst/>
+          </a:prstGeom>
+        </p:spPr>
+        <p:txBody>
+          <a:bodyPr vert="horz" wrap="square" lIns="0" tIns="17145" rIns="0" bIns="0" rtlCol="0">
+            <a:spAutoFit/>
+          </a:bodyPr>
+          <a:lstStyle/>
+          <a:p>
+            <a:pPr marL="12700">
+              <a:lnSpc>
+                <a:spcPct val="100000"/>
+              </a:lnSpc>
+              <a:spcBef>
+                <a:spcPts val="135"/>
+              </a:spcBef>
+            </a:pPr>
+            <a:r>
+              <a:rPr spc="114" dirty="0">
+                <a:latin typeface="Cambria Math" panose="02040503050406030204" pitchFamily="18" charset="0"/>
+                <a:ea typeface="Cambria Math" panose="02040503050406030204" pitchFamily="18" charset="0"/>
+              </a:rPr>
+              <a:t>Presentation</a:t>
+            </a:r>
+            <a:r>
+              <a:rPr spc="245" dirty="0">
+                <a:latin typeface="Cambria Math" panose="02040503050406030204" pitchFamily="18" charset="0"/>
+                <a:ea typeface="Cambria Math" panose="02040503050406030204" pitchFamily="18" charset="0"/>
+              </a:rPr>
+              <a:t> </a:t>
+            </a:r>
+            <a:r>
+              <a:rPr spc="120" dirty="0">
+                <a:latin typeface="Cambria Math" panose="02040503050406030204" pitchFamily="18" charset="0"/>
+                <a:ea typeface="Cambria Math" panose="02040503050406030204" pitchFamily="18" charset="0"/>
+              </a:rPr>
+              <a:t>Outline</a:t>
+            </a:r>
+          </a:p>
+        </p:txBody>
+      </p:sp>
+      <p:sp>
+        <p:nvSpPr>
+          <p:cNvPr id="3" name="object 3"/>
+          <p:cNvSpPr txBox="1"/>
+          <p:nvPr/>
+        </p:nvSpPr>
+        <p:spPr>
+          <a:xfrm>
+            <a:off x="4393027" y="88524"/>
+            <a:ext cx="88900" cy="177800"/>
+          </a:xfrm>
+          <a:prstGeom prst="rect">
+            <a:avLst/>
+          </a:prstGeom>
+        </p:spPr>
+        <p:txBody>
+          <a:bodyPr vert="horz" wrap="square" lIns="0" tIns="12065" rIns="0" bIns="0" rtlCol="0">
+            <a:spAutoFit/>
+          </a:bodyPr>
+          <a:lstStyle/>
+          <a:p>
+            <a:pPr marL="12700">
+              <a:lnSpc>
+                <a:spcPct val="100000"/>
+              </a:lnSpc>
+              <a:spcBef>
+                <a:spcPts val="95"/>
+              </a:spcBef>
+            </a:pPr>
+            <a:r>
+              <a:rPr sz="1000" spc="-50" dirty="0">
+                <a:solidFill>
+                  <a:srgbClr val="070707"/>
+                </a:solidFill>
+                <a:latin typeface="Calibri"/>
+                <a:cs typeface="Calibri"/>
+              </a:rPr>
+              <a:t>2</a:t>
+            </a:r>
+            <a:endParaRPr sz="1000">
+              <a:latin typeface="Calibri"/>
+              <a:cs typeface="Calibri"/>
+            </a:endParaRPr>
+          </a:p>
+        </p:txBody>
+      </p:sp>
+      <p:grpSp>
+        <p:nvGrpSpPr>
+          <p:cNvPr id="4" name="object 4"/>
+          <p:cNvGrpSpPr/>
+          <p:nvPr/>
+        </p:nvGrpSpPr>
+        <p:grpSpPr>
+          <a:xfrm>
+            <a:off x="-5071" y="324420"/>
+            <a:ext cx="2890520" cy="46355"/>
+            <a:chOff x="-5071" y="324420"/>
+            <a:chExt cx="2890520" cy="46355"/>
+          </a:xfrm>
+        </p:grpSpPr>
+        <p:sp>
+          <p:nvSpPr>
+            <p:cNvPr id="5" name="object 5"/>
+            <p:cNvSpPr/>
+            <p:nvPr/>
+          </p:nvSpPr>
+          <p:spPr>
+            <a:xfrm>
+              <a:off x="-10" y="329481"/>
+              <a:ext cx="2880360" cy="36195"/>
+            </a:xfrm>
+            <a:custGeom>
+              <a:avLst/>
+              <a:gdLst/>
+              <a:ahLst/>
+              <a:cxnLst/>
+              <a:rect l="l" t="t" r="r" b="b"/>
+              <a:pathLst>
+                <a:path w="2880360" h="36195">
+                  <a:moveTo>
+                    <a:pt x="2880035" y="0"/>
+                  </a:moveTo>
+                  <a:lnTo>
+                    <a:pt x="0" y="0"/>
+                  </a:lnTo>
+                  <a:lnTo>
+                    <a:pt x="0" y="36002"/>
+                  </a:lnTo>
+                  <a:lnTo>
+                    <a:pt x="2880035" y="0"/>
+                  </a:lnTo>
+                  <a:close/>
+                </a:path>
+              </a:pathLst>
+            </a:custGeom>
+            <a:solidFill>
+              <a:srgbClr val="FF7F00"/>
+            </a:solidFill>
+          </p:spPr>
+          <p:txBody>
+            <a:bodyPr wrap="square" lIns="0" tIns="0" rIns="0" bIns="0" rtlCol="0"/>
+            <a:lstStyle/>
+            <a:p>
+              <a:endParaRPr/>
+            </a:p>
+          </p:txBody>
+        </p:sp>
+        <p:sp>
+          <p:nvSpPr>
+            <p:cNvPr id="6" name="object 6"/>
+            <p:cNvSpPr/>
+            <p:nvPr/>
+          </p:nvSpPr>
+          <p:spPr>
+            <a:xfrm>
+              <a:off x="-10" y="329481"/>
+              <a:ext cx="2880360" cy="36195"/>
+            </a:xfrm>
+            <a:custGeom>
+              <a:avLst/>
+              <a:gdLst/>
+              <a:ahLst/>
+              <a:cxnLst/>
+              <a:rect l="l" t="t" r="r" b="b"/>
+              <a:pathLst>
+                <a:path w="2880360" h="36195">
+                  <a:moveTo>
+                    <a:pt x="0" y="0"/>
+                  </a:moveTo>
+                  <a:lnTo>
+                    <a:pt x="2880035" y="0"/>
+                  </a:lnTo>
+                  <a:lnTo>
+                    <a:pt x="0" y="36002"/>
+                  </a:lnTo>
+                  <a:lnTo>
+                    <a:pt x="0" y="0"/>
+                  </a:lnTo>
+                </a:path>
+              </a:pathLst>
+            </a:custGeom>
+            <a:ln w="10122">
+              <a:solidFill>
+                <a:srgbClr val="FF7F00"/>
+              </a:solidFill>
+            </a:ln>
+          </p:spPr>
+          <p:txBody>
+            <a:bodyPr wrap="square" lIns="0" tIns="0" rIns="0" bIns="0" rtlCol="0"/>
+            <a:lstStyle/>
+            <a:p>
+              <a:endParaRPr/>
+            </a:p>
+          </p:txBody>
+        </p:sp>
+      </p:grpSp>
+      <p:sp>
+        <p:nvSpPr>
+          <p:cNvPr id="7" name="object 7"/>
+          <p:cNvSpPr txBox="1"/>
+          <p:nvPr/>
+        </p:nvSpPr>
+        <p:spPr>
+          <a:xfrm>
+            <a:off x="347294" y="941487"/>
+            <a:ext cx="2880360" cy="1249766"/>
+          </a:xfrm>
+          <a:prstGeom prst="rect">
+            <a:avLst/>
+          </a:prstGeom>
+        </p:spPr>
+        <p:txBody>
+          <a:bodyPr vert="horz" wrap="square" lIns="0" tIns="11430" rIns="0" bIns="0" rtlCol="0">
+            <a:spAutoFit/>
+          </a:bodyPr>
+          <a:lstStyle/>
+          <a:p>
+            <a:pPr marL="12700">
+              <a:lnSpc>
+                <a:spcPct val="150000"/>
+              </a:lnSpc>
+              <a:spcBef>
+                <a:spcPts val="90"/>
+              </a:spcBef>
+            </a:pPr>
+            <a:r>
+              <a:rPr sz="1100" b="1" spc="85" dirty="0">
+                <a:solidFill>
+                  <a:srgbClr val="BF003F"/>
+                </a:solidFill>
+                <a:latin typeface="Cambria Math" panose="02040503050406030204" pitchFamily="18" charset="0"/>
+                <a:ea typeface="Cambria Math" panose="02040503050406030204" pitchFamily="18" charset="0"/>
+                <a:cs typeface="Calibri"/>
+              </a:rPr>
+              <a:t>Introduction</a:t>
+            </a:r>
+            <a:endParaRPr sz="1100" dirty="0">
+              <a:latin typeface="Cambria Math" panose="02040503050406030204" pitchFamily="18" charset="0"/>
+              <a:ea typeface="Cambria Math" panose="02040503050406030204" pitchFamily="18" charset="0"/>
+              <a:cs typeface="Calibri"/>
+            </a:endParaRPr>
+          </a:p>
+          <a:p>
+            <a:pPr marL="12700" marR="1135380">
+              <a:lnSpc>
+                <a:spcPct val="150000"/>
+              </a:lnSpc>
+            </a:pPr>
+            <a:r>
+              <a:rPr sz="1100" b="1" spc="100" dirty="0">
+                <a:solidFill>
+                  <a:srgbClr val="BF003F"/>
+                </a:solidFill>
+                <a:latin typeface="Cambria Math" panose="02040503050406030204" pitchFamily="18" charset="0"/>
+                <a:ea typeface="Cambria Math" panose="02040503050406030204" pitchFamily="18" charset="0"/>
+                <a:cs typeface="Calibri"/>
+              </a:rPr>
+              <a:t>Literature</a:t>
+            </a:r>
+            <a:r>
+              <a:rPr lang="en-US" sz="1100" b="1" spc="100" dirty="0">
+                <a:solidFill>
+                  <a:srgbClr val="BF003F"/>
+                </a:solidFill>
+                <a:latin typeface="Cambria Math" panose="02040503050406030204" pitchFamily="18" charset="0"/>
+                <a:ea typeface="Cambria Math" panose="02040503050406030204" pitchFamily="18" charset="0"/>
+                <a:cs typeface="Calibri"/>
+              </a:rPr>
+              <a:t> </a:t>
+            </a:r>
+            <a:r>
+              <a:rPr sz="1100" b="1" spc="95" dirty="0">
+                <a:solidFill>
+                  <a:srgbClr val="BF003F"/>
+                </a:solidFill>
+                <a:latin typeface="Cambria Math" panose="02040503050406030204" pitchFamily="18" charset="0"/>
+                <a:ea typeface="Cambria Math" panose="02040503050406030204" pitchFamily="18" charset="0"/>
+                <a:cs typeface="Calibri"/>
+              </a:rPr>
+              <a:t>Review</a:t>
+            </a:r>
+            <a:endParaRPr lang="en-US" sz="1100" b="1" spc="95" dirty="0">
+              <a:solidFill>
+                <a:srgbClr val="BF003F"/>
+              </a:solidFill>
+              <a:latin typeface="Cambria Math" panose="02040503050406030204" pitchFamily="18" charset="0"/>
+              <a:ea typeface="Cambria Math" panose="02040503050406030204" pitchFamily="18" charset="0"/>
+              <a:cs typeface="Calibri"/>
+            </a:endParaRPr>
+          </a:p>
+          <a:p>
+            <a:pPr marL="12700" marR="1135380">
+              <a:lnSpc>
+                <a:spcPct val="150000"/>
+              </a:lnSpc>
+            </a:pPr>
+            <a:r>
+              <a:rPr sz="1100" b="1" spc="95" dirty="0">
+                <a:solidFill>
+                  <a:srgbClr val="BF003F"/>
+                </a:solidFill>
+                <a:latin typeface="Cambria Math" panose="02040503050406030204" pitchFamily="18" charset="0"/>
+                <a:ea typeface="Cambria Math" panose="02040503050406030204" pitchFamily="18" charset="0"/>
+                <a:cs typeface="Calibri"/>
+              </a:rPr>
+              <a:t> </a:t>
+            </a:r>
+            <a:r>
+              <a:rPr lang="en-US" sz="1100" b="1" spc="95" dirty="0">
+                <a:solidFill>
+                  <a:srgbClr val="BF003F"/>
+                </a:solidFill>
+                <a:latin typeface="Cambria Math" panose="02040503050406030204" pitchFamily="18" charset="0"/>
+                <a:ea typeface="Cambria Math" panose="02040503050406030204" pitchFamily="18" charset="0"/>
+                <a:cs typeface="Calibri"/>
+              </a:rPr>
+              <a:t>Research Gap</a:t>
+            </a:r>
+          </a:p>
+          <a:p>
+            <a:pPr marL="12700" marR="1135380">
+              <a:lnSpc>
+                <a:spcPct val="150000"/>
+              </a:lnSpc>
+            </a:pPr>
+            <a:r>
+              <a:rPr sz="1100" b="1" spc="80" dirty="0">
+                <a:solidFill>
+                  <a:srgbClr val="BF003F"/>
+                </a:solidFill>
+                <a:latin typeface="Cambria Math" panose="02040503050406030204" pitchFamily="18" charset="0"/>
+                <a:ea typeface="Cambria Math" panose="02040503050406030204" pitchFamily="18" charset="0"/>
+                <a:cs typeface="Calibri"/>
+              </a:rPr>
+              <a:t>Methodology</a:t>
+            </a:r>
+            <a:endParaRPr sz="1100" dirty="0">
+              <a:latin typeface="Cambria Math" panose="02040503050406030204" pitchFamily="18" charset="0"/>
+              <a:ea typeface="Cambria Math" panose="02040503050406030204" pitchFamily="18" charset="0"/>
+              <a:cs typeface="Calibri"/>
+            </a:endParaRPr>
+          </a:p>
+          <a:p>
+            <a:pPr marL="12700" marR="5080">
+              <a:lnSpc>
+                <a:spcPct val="150000"/>
+              </a:lnSpc>
+            </a:pPr>
+            <a:r>
+              <a:rPr sz="1100" b="1" spc="114" dirty="0">
+                <a:solidFill>
+                  <a:srgbClr val="BF003F"/>
+                </a:solidFill>
+                <a:latin typeface="Cambria Math" panose="02040503050406030204" pitchFamily="18" charset="0"/>
+                <a:ea typeface="Cambria Math" panose="02040503050406030204" pitchFamily="18" charset="0"/>
+                <a:cs typeface="Calibri"/>
+              </a:rPr>
+              <a:t>Project</a:t>
+            </a:r>
+            <a:r>
+              <a:rPr sz="1100" b="1" spc="185" dirty="0">
+                <a:solidFill>
+                  <a:srgbClr val="BF003F"/>
+                </a:solidFill>
+                <a:latin typeface="Cambria Math" panose="02040503050406030204" pitchFamily="18" charset="0"/>
+                <a:ea typeface="Cambria Math" panose="02040503050406030204" pitchFamily="18" charset="0"/>
+                <a:cs typeface="Calibri"/>
+              </a:rPr>
+              <a:t> </a:t>
+            </a:r>
+            <a:r>
+              <a:rPr sz="1100" b="1" spc="95" dirty="0">
+                <a:solidFill>
+                  <a:srgbClr val="BF003F"/>
+                </a:solidFill>
+                <a:latin typeface="Cambria Math" panose="02040503050406030204" pitchFamily="18" charset="0"/>
+                <a:ea typeface="Cambria Math" panose="02040503050406030204" pitchFamily="18" charset="0"/>
+                <a:cs typeface="Calibri"/>
+              </a:rPr>
+              <a:t>Progress</a:t>
+            </a:r>
+            <a:r>
+              <a:rPr sz="1100" b="1" spc="185" dirty="0">
+                <a:solidFill>
+                  <a:srgbClr val="BF003F"/>
+                </a:solidFill>
+                <a:latin typeface="Cambria Math" panose="02040503050406030204" pitchFamily="18" charset="0"/>
+                <a:ea typeface="Cambria Math" panose="02040503050406030204" pitchFamily="18" charset="0"/>
+                <a:cs typeface="Calibri"/>
+              </a:rPr>
+              <a:t> </a:t>
+            </a:r>
+            <a:r>
+              <a:rPr sz="1100" b="1" spc="190" dirty="0">
+                <a:solidFill>
+                  <a:srgbClr val="BF003F"/>
+                </a:solidFill>
+                <a:latin typeface="Cambria Math" panose="02040503050406030204" pitchFamily="18" charset="0"/>
+                <a:ea typeface="Cambria Math" panose="02040503050406030204" pitchFamily="18" charset="0"/>
+                <a:cs typeface="Calibri"/>
+              </a:rPr>
+              <a:t>&amp; </a:t>
+            </a:r>
+            <a:r>
+              <a:rPr sz="1100" b="1" spc="100" dirty="0">
+                <a:solidFill>
+                  <a:srgbClr val="BF003F"/>
+                </a:solidFill>
+                <a:latin typeface="Cambria Math" panose="02040503050406030204" pitchFamily="18" charset="0"/>
+                <a:ea typeface="Cambria Math" panose="02040503050406030204" pitchFamily="18" charset="0"/>
+                <a:cs typeface="Calibri"/>
+              </a:rPr>
+              <a:t>Pending</a:t>
+            </a:r>
+            <a:r>
+              <a:rPr sz="1100" b="1" spc="185" dirty="0">
+                <a:solidFill>
+                  <a:srgbClr val="BF003F"/>
+                </a:solidFill>
+                <a:latin typeface="Cambria Math" panose="02040503050406030204" pitchFamily="18" charset="0"/>
+                <a:ea typeface="Cambria Math" panose="02040503050406030204" pitchFamily="18" charset="0"/>
+                <a:cs typeface="Calibri"/>
+              </a:rPr>
+              <a:t> </a:t>
+            </a:r>
+            <a:r>
+              <a:rPr sz="1100" b="1" spc="95" dirty="0">
+                <a:solidFill>
+                  <a:srgbClr val="BF003F"/>
+                </a:solidFill>
+                <a:latin typeface="Cambria Math" panose="02040503050406030204" pitchFamily="18" charset="0"/>
+                <a:ea typeface="Cambria Math" panose="02040503050406030204" pitchFamily="18" charset="0"/>
+                <a:cs typeface="Calibri"/>
+              </a:rPr>
+              <a:t>Work</a:t>
+            </a:r>
+            <a:endParaRPr sz="1100" dirty="0">
+              <a:latin typeface="Cambria Math" panose="02040503050406030204" pitchFamily="18" charset="0"/>
+              <a:ea typeface="Cambria Math" panose="02040503050406030204" pitchFamily="18" charset="0"/>
+              <a:cs typeface="Calibri"/>
+            </a:endParaRPr>
+          </a:p>
+        </p:txBody>
+      </p:sp>
+      <p:sp>
+        <p:nvSpPr>
+          <p:cNvPr id="8" name="object 8"/>
+          <p:cNvSpPr/>
+          <p:nvPr/>
+        </p:nvSpPr>
+        <p:spPr>
+          <a:xfrm>
+            <a:off x="0" y="3275998"/>
+            <a:ext cx="4608195" cy="0"/>
+          </a:xfrm>
+          <a:custGeom>
+            <a:avLst/>
+            <a:gdLst/>
+            <a:ahLst/>
+            <a:cxnLst/>
+            <a:rect l="l" t="t" r="r" b="b"/>
+            <a:pathLst>
+              <a:path w="4608195">
+                <a:moveTo>
+                  <a:pt x="0" y="0"/>
+                </a:moveTo>
+                <a:lnTo>
+                  <a:pt x="4608060" y="0"/>
+                </a:lnTo>
+              </a:path>
+            </a:pathLst>
+          </a:custGeom>
+          <a:ln w="15183">
+            <a:solidFill>
+              <a:srgbClr val="001F44"/>
+            </a:solidFill>
+          </a:ln>
+        </p:spPr>
+        <p:txBody>
+          <a:bodyPr wrap="square" lIns="0" tIns="0" rIns="0" bIns="0" rtlCol="0"/>
+          <a:lstStyle/>
+          <a:p>
+            <a:endParaRPr/>
+          </a:p>
+        </p:txBody>
+      </p:sp>
+    </p:spTree>
+  </p:cSld>
+  <p:clrMapOvr>
+    <a:masterClrMapping/>
+  </p:clrMapOvr>
+  <p:transition>
+    <p:cut/>
+  </p:transition>
+</p:sld>
+</file>
+
+<file path=ppt/slides/slide20.xml><?xml version="1.0" encoding="utf-8"?>
 <p:sld xmlns:a="http://schemas.openxmlformats.org/drawingml/2006/main" xmlns:r="http://schemas.openxmlformats.org/officeDocument/2006/relationships" xmlns:p="http://schemas.openxmlformats.org/presentationml/2006/main">
   <p:cSld>
     <p:spTree>
@@ -5058,538 +5908,7 @@
 </p:sld>
 </file>
 
-<file path=ppt/slides/slide2.xml><?xml version="1.0" encoding="utf-8"?>
-<p:sld xmlns:a="http://schemas.openxmlformats.org/drawingml/2006/main" xmlns:r="http://schemas.openxmlformats.org/officeDocument/2006/relationships" xmlns:p="http://schemas.openxmlformats.org/presentationml/2006/main" showMasterSp="0">
-  <p:cSld>
-    <p:spTree>
-      <p:nvGrpSpPr>
-        <p:cNvPr id="1" name=""/>
-        <p:cNvGrpSpPr/>
-        <p:nvPr/>
-      </p:nvGrpSpPr>
-      <p:grpSpPr>
-        <a:xfrm>
-          <a:off x="0" y="0"/>
-          <a:ext cx="0" cy="0"/>
-          <a:chOff x="0" y="0"/>
-          <a:chExt cx="0" cy="0"/>
-        </a:xfrm>
-      </p:grpSpPr>
-      <p:sp>
-        <p:nvSpPr>
-          <p:cNvPr id="2" name="object 2"/>
-          <p:cNvSpPr txBox="1">
-            <a:spLocks noGrp="1"/>
-          </p:cNvSpPr>
-          <p:nvPr>
-            <p:ph type="title"/>
-          </p:nvPr>
-        </p:nvSpPr>
-        <p:spPr>
-          <a:xfrm>
-            <a:off x="144195" y="32852"/>
-            <a:ext cx="1894205" cy="232756"/>
-          </a:xfrm>
-          <a:prstGeom prst="rect">
-            <a:avLst/>
-          </a:prstGeom>
-        </p:spPr>
-        <p:txBody>
-          <a:bodyPr vert="horz" wrap="square" lIns="0" tIns="17145" rIns="0" bIns="0" rtlCol="0">
-            <a:spAutoFit/>
-          </a:bodyPr>
-          <a:lstStyle/>
-          <a:p>
-            <a:pPr marL="12700">
-              <a:lnSpc>
-                <a:spcPct val="100000"/>
-              </a:lnSpc>
-              <a:spcBef>
-                <a:spcPts val="135"/>
-              </a:spcBef>
-            </a:pPr>
-            <a:r>
-              <a:rPr spc="114" dirty="0">
-                <a:latin typeface="Cambria Math" panose="02040503050406030204" pitchFamily="18" charset="0"/>
-                <a:ea typeface="Cambria Math" panose="02040503050406030204" pitchFamily="18" charset="0"/>
-              </a:rPr>
-              <a:t>Presentation</a:t>
-            </a:r>
-            <a:r>
-              <a:rPr spc="245" dirty="0">
-                <a:latin typeface="Cambria Math" panose="02040503050406030204" pitchFamily="18" charset="0"/>
-                <a:ea typeface="Cambria Math" panose="02040503050406030204" pitchFamily="18" charset="0"/>
-              </a:rPr>
-              <a:t> </a:t>
-            </a:r>
-            <a:r>
-              <a:rPr spc="120" dirty="0">
-                <a:latin typeface="Cambria Math" panose="02040503050406030204" pitchFamily="18" charset="0"/>
-                <a:ea typeface="Cambria Math" panose="02040503050406030204" pitchFamily="18" charset="0"/>
-              </a:rPr>
-              <a:t>Outline</a:t>
-            </a:r>
-          </a:p>
-        </p:txBody>
-      </p:sp>
-      <p:sp>
-        <p:nvSpPr>
-          <p:cNvPr id="3" name="object 3"/>
-          <p:cNvSpPr txBox="1"/>
-          <p:nvPr/>
-        </p:nvSpPr>
-        <p:spPr>
-          <a:xfrm>
-            <a:off x="4393027" y="88524"/>
-            <a:ext cx="88900" cy="177800"/>
-          </a:xfrm>
-          <a:prstGeom prst="rect">
-            <a:avLst/>
-          </a:prstGeom>
-        </p:spPr>
-        <p:txBody>
-          <a:bodyPr vert="horz" wrap="square" lIns="0" tIns="12065" rIns="0" bIns="0" rtlCol="0">
-            <a:spAutoFit/>
-          </a:bodyPr>
-          <a:lstStyle/>
-          <a:p>
-            <a:pPr marL="12700">
-              <a:lnSpc>
-                <a:spcPct val="100000"/>
-              </a:lnSpc>
-              <a:spcBef>
-                <a:spcPts val="95"/>
-              </a:spcBef>
-            </a:pPr>
-            <a:r>
-              <a:rPr sz="1000" spc="-50" dirty="0">
-                <a:solidFill>
-                  <a:srgbClr val="070707"/>
-                </a:solidFill>
-                <a:latin typeface="Calibri"/>
-                <a:cs typeface="Calibri"/>
-              </a:rPr>
-              <a:t>2</a:t>
-            </a:r>
-            <a:endParaRPr sz="1000">
-              <a:latin typeface="Calibri"/>
-              <a:cs typeface="Calibri"/>
-            </a:endParaRPr>
-          </a:p>
-        </p:txBody>
-      </p:sp>
-      <p:grpSp>
-        <p:nvGrpSpPr>
-          <p:cNvPr id="4" name="object 4"/>
-          <p:cNvGrpSpPr/>
-          <p:nvPr/>
-        </p:nvGrpSpPr>
-        <p:grpSpPr>
-          <a:xfrm>
-            <a:off x="-5071" y="324420"/>
-            <a:ext cx="2890520" cy="46355"/>
-            <a:chOff x="-5071" y="324420"/>
-            <a:chExt cx="2890520" cy="46355"/>
-          </a:xfrm>
-        </p:grpSpPr>
-        <p:sp>
-          <p:nvSpPr>
-            <p:cNvPr id="5" name="object 5"/>
-            <p:cNvSpPr/>
-            <p:nvPr/>
-          </p:nvSpPr>
-          <p:spPr>
-            <a:xfrm>
-              <a:off x="-10" y="329481"/>
-              <a:ext cx="2880360" cy="36195"/>
-            </a:xfrm>
-            <a:custGeom>
-              <a:avLst/>
-              <a:gdLst/>
-              <a:ahLst/>
-              <a:cxnLst/>
-              <a:rect l="l" t="t" r="r" b="b"/>
-              <a:pathLst>
-                <a:path w="2880360" h="36195">
-                  <a:moveTo>
-                    <a:pt x="2880035" y="0"/>
-                  </a:moveTo>
-                  <a:lnTo>
-                    <a:pt x="0" y="0"/>
-                  </a:lnTo>
-                  <a:lnTo>
-                    <a:pt x="0" y="36002"/>
-                  </a:lnTo>
-                  <a:lnTo>
-                    <a:pt x="2880035" y="0"/>
-                  </a:lnTo>
-                  <a:close/>
-                </a:path>
-              </a:pathLst>
-            </a:custGeom>
-            <a:solidFill>
-              <a:srgbClr val="FF7F00"/>
-            </a:solidFill>
-          </p:spPr>
-          <p:txBody>
-            <a:bodyPr wrap="square" lIns="0" tIns="0" rIns="0" bIns="0" rtlCol="0"/>
-            <a:lstStyle/>
-            <a:p>
-              <a:endParaRPr/>
-            </a:p>
-          </p:txBody>
-        </p:sp>
-        <p:sp>
-          <p:nvSpPr>
-            <p:cNvPr id="6" name="object 6"/>
-            <p:cNvSpPr/>
-            <p:nvPr/>
-          </p:nvSpPr>
-          <p:spPr>
-            <a:xfrm>
-              <a:off x="-10" y="329481"/>
-              <a:ext cx="2880360" cy="36195"/>
-            </a:xfrm>
-            <a:custGeom>
-              <a:avLst/>
-              <a:gdLst/>
-              <a:ahLst/>
-              <a:cxnLst/>
-              <a:rect l="l" t="t" r="r" b="b"/>
-              <a:pathLst>
-                <a:path w="2880360" h="36195">
-                  <a:moveTo>
-                    <a:pt x="0" y="0"/>
-                  </a:moveTo>
-                  <a:lnTo>
-                    <a:pt x="2880035" y="0"/>
-                  </a:lnTo>
-                  <a:lnTo>
-                    <a:pt x="0" y="36002"/>
-                  </a:lnTo>
-                  <a:lnTo>
-                    <a:pt x="0" y="0"/>
-                  </a:lnTo>
-                </a:path>
-              </a:pathLst>
-            </a:custGeom>
-            <a:ln w="10122">
-              <a:solidFill>
-                <a:srgbClr val="FF7F00"/>
-              </a:solidFill>
-            </a:ln>
-          </p:spPr>
-          <p:txBody>
-            <a:bodyPr wrap="square" lIns="0" tIns="0" rIns="0" bIns="0" rtlCol="0"/>
-            <a:lstStyle/>
-            <a:p>
-              <a:endParaRPr/>
-            </a:p>
-          </p:txBody>
-        </p:sp>
-      </p:grpSp>
-      <p:sp>
-        <p:nvSpPr>
-          <p:cNvPr id="7" name="object 7"/>
-          <p:cNvSpPr txBox="1"/>
-          <p:nvPr/>
-        </p:nvSpPr>
-        <p:spPr>
-          <a:xfrm>
-            <a:off x="347294" y="941487"/>
-            <a:ext cx="2880360" cy="1249766"/>
-          </a:xfrm>
-          <a:prstGeom prst="rect">
-            <a:avLst/>
-          </a:prstGeom>
-        </p:spPr>
-        <p:txBody>
-          <a:bodyPr vert="horz" wrap="square" lIns="0" tIns="11430" rIns="0" bIns="0" rtlCol="0">
-            <a:spAutoFit/>
-          </a:bodyPr>
-          <a:lstStyle/>
-          <a:p>
-            <a:pPr marL="12700">
-              <a:lnSpc>
-                <a:spcPct val="150000"/>
-              </a:lnSpc>
-              <a:spcBef>
-                <a:spcPts val="90"/>
-              </a:spcBef>
-            </a:pPr>
-            <a:r>
-              <a:rPr sz="1100" b="1" spc="85" dirty="0">
-                <a:solidFill>
-                  <a:srgbClr val="BF003F"/>
-                </a:solidFill>
-                <a:latin typeface="Cambria Math" panose="02040503050406030204" pitchFamily="18" charset="0"/>
-                <a:ea typeface="Cambria Math" panose="02040503050406030204" pitchFamily="18" charset="0"/>
-                <a:cs typeface="Calibri"/>
-              </a:rPr>
-              <a:t>Introduction</a:t>
-            </a:r>
-            <a:endParaRPr sz="1100" dirty="0">
-              <a:latin typeface="Cambria Math" panose="02040503050406030204" pitchFamily="18" charset="0"/>
-              <a:ea typeface="Cambria Math" panose="02040503050406030204" pitchFamily="18" charset="0"/>
-              <a:cs typeface="Calibri"/>
-            </a:endParaRPr>
-          </a:p>
-          <a:p>
-            <a:pPr marL="12700" marR="1135380">
-              <a:lnSpc>
-                <a:spcPct val="150000"/>
-              </a:lnSpc>
-            </a:pPr>
-            <a:r>
-              <a:rPr sz="1100" b="1" spc="100" dirty="0">
-                <a:solidFill>
-                  <a:srgbClr val="BF003F"/>
-                </a:solidFill>
-                <a:latin typeface="Cambria Math" panose="02040503050406030204" pitchFamily="18" charset="0"/>
-                <a:ea typeface="Cambria Math" panose="02040503050406030204" pitchFamily="18" charset="0"/>
-                <a:cs typeface="Calibri"/>
-              </a:rPr>
-              <a:t>Literature</a:t>
-            </a:r>
-            <a:r>
-              <a:rPr lang="en-US" sz="1100" b="1" spc="100" dirty="0">
-                <a:solidFill>
-                  <a:srgbClr val="BF003F"/>
-                </a:solidFill>
-                <a:latin typeface="Cambria Math" panose="02040503050406030204" pitchFamily="18" charset="0"/>
-                <a:ea typeface="Cambria Math" panose="02040503050406030204" pitchFamily="18" charset="0"/>
-                <a:cs typeface="Calibri"/>
-              </a:rPr>
-              <a:t> </a:t>
-            </a:r>
-            <a:r>
-              <a:rPr sz="1100" b="1" spc="95" dirty="0">
-                <a:solidFill>
-                  <a:srgbClr val="BF003F"/>
-                </a:solidFill>
-                <a:latin typeface="Cambria Math" panose="02040503050406030204" pitchFamily="18" charset="0"/>
-                <a:ea typeface="Cambria Math" panose="02040503050406030204" pitchFamily="18" charset="0"/>
-                <a:cs typeface="Calibri"/>
-              </a:rPr>
-              <a:t>Review</a:t>
-            </a:r>
-            <a:endParaRPr lang="en-US" sz="1100" b="1" spc="95" dirty="0">
-              <a:solidFill>
-                <a:srgbClr val="BF003F"/>
-              </a:solidFill>
-              <a:latin typeface="Cambria Math" panose="02040503050406030204" pitchFamily="18" charset="0"/>
-              <a:ea typeface="Cambria Math" panose="02040503050406030204" pitchFamily="18" charset="0"/>
-              <a:cs typeface="Calibri"/>
-            </a:endParaRPr>
-          </a:p>
-          <a:p>
-            <a:pPr marL="12700" marR="1135380">
-              <a:lnSpc>
-                <a:spcPct val="150000"/>
-              </a:lnSpc>
-            </a:pPr>
-            <a:r>
-              <a:rPr sz="1100" b="1" spc="95" dirty="0">
-                <a:solidFill>
-                  <a:srgbClr val="BF003F"/>
-                </a:solidFill>
-                <a:latin typeface="Cambria Math" panose="02040503050406030204" pitchFamily="18" charset="0"/>
-                <a:ea typeface="Cambria Math" panose="02040503050406030204" pitchFamily="18" charset="0"/>
-                <a:cs typeface="Calibri"/>
-              </a:rPr>
-              <a:t> </a:t>
-            </a:r>
-            <a:r>
-              <a:rPr lang="en-US" sz="1100" b="1" spc="95" dirty="0">
-                <a:solidFill>
-                  <a:srgbClr val="BF003F"/>
-                </a:solidFill>
-                <a:latin typeface="Cambria Math" panose="02040503050406030204" pitchFamily="18" charset="0"/>
-                <a:ea typeface="Cambria Math" panose="02040503050406030204" pitchFamily="18" charset="0"/>
-                <a:cs typeface="Calibri"/>
-              </a:rPr>
-              <a:t>Research Gap</a:t>
-            </a:r>
-          </a:p>
-          <a:p>
-            <a:pPr marL="12700" marR="1135380">
-              <a:lnSpc>
-                <a:spcPct val="150000"/>
-              </a:lnSpc>
-            </a:pPr>
-            <a:r>
-              <a:rPr sz="1100" b="1" spc="80" dirty="0">
-                <a:solidFill>
-                  <a:srgbClr val="BF003F"/>
-                </a:solidFill>
-                <a:latin typeface="Cambria Math" panose="02040503050406030204" pitchFamily="18" charset="0"/>
-                <a:ea typeface="Cambria Math" panose="02040503050406030204" pitchFamily="18" charset="0"/>
-                <a:cs typeface="Calibri"/>
-              </a:rPr>
-              <a:t>Methodology</a:t>
-            </a:r>
-            <a:endParaRPr sz="1100" dirty="0">
-              <a:latin typeface="Cambria Math" panose="02040503050406030204" pitchFamily="18" charset="0"/>
-              <a:ea typeface="Cambria Math" panose="02040503050406030204" pitchFamily="18" charset="0"/>
-              <a:cs typeface="Calibri"/>
-            </a:endParaRPr>
-          </a:p>
-          <a:p>
-            <a:pPr marL="12700" marR="5080">
-              <a:lnSpc>
-                <a:spcPct val="150000"/>
-              </a:lnSpc>
-            </a:pPr>
-            <a:r>
-              <a:rPr sz="1100" b="1" spc="114" dirty="0">
-                <a:solidFill>
-                  <a:srgbClr val="BF003F"/>
-                </a:solidFill>
-                <a:latin typeface="Cambria Math" panose="02040503050406030204" pitchFamily="18" charset="0"/>
-                <a:ea typeface="Cambria Math" panose="02040503050406030204" pitchFamily="18" charset="0"/>
-                <a:cs typeface="Calibri"/>
-              </a:rPr>
-              <a:t>Project</a:t>
-            </a:r>
-            <a:r>
-              <a:rPr sz="1100" b="1" spc="185" dirty="0">
-                <a:solidFill>
-                  <a:srgbClr val="BF003F"/>
-                </a:solidFill>
-                <a:latin typeface="Cambria Math" panose="02040503050406030204" pitchFamily="18" charset="0"/>
-                <a:ea typeface="Cambria Math" panose="02040503050406030204" pitchFamily="18" charset="0"/>
-                <a:cs typeface="Calibri"/>
-              </a:rPr>
-              <a:t> </a:t>
-            </a:r>
-            <a:r>
-              <a:rPr sz="1100" b="1" spc="95" dirty="0">
-                <a:solidFill>
-                  <a:srgbClr val="BF003F"/>
-                </a:solidFill>
-                <a:latin typeface="Cambria Math" panose="02040503050406030204" pitchFamily="18" charset="0"/>
-                <a:ea typeface="Cambria Math" panose="02040503050406030204" pitchFamily="18" charset="0"/>
-                <a:cs typeface="Calibri"/>
-              </a:rPr>
-              <a:t>Progress</a:t>
-            </a:r>
-            <a:r>
-              <a:rPr sz="1100" b="1" spc="185" dirty="0">
-                <a:solidFill>
-                  <a:srgbClr val="BF003F"/>
-                </a:solidFill>
-                <a:latin typeface="Cambria Math" panose="02040503050406030204" pitchFamily="18" charset="0"/>
-                <a:ea typeface="Cambria Math" panose="02040503050406030204" pitchFamily="18" charset="0"/>
-                <a:cs typeface="Calibri"/>
-              </a:rPr>
-              <a:t> </a:t>
-            </a:r>
-            <a:r>
-              <a:rPr sz="1100" b="1" spc="190" dirty="0">
-                <a:solidFill>
-                  <a:srgbClr val="BF003F"/>
-                </a:solidFill>
-                <a:latin typeface="Cambria Math" panose="02040503050406030204" pitchFamily="18" charset="0"/>
-                <a:ea typeface="Cambria Math" panose="02040503050406030204" pitchFamily="18" charset="0"/>
-                <a:cs typeface="Calibri"/>
-              </a:rPr>
-              <a:t>&amp; </a:t>
-            </a:r>
-            <a:r>
-              <a:rPr sz="1100" b="1" spc="100" dirty="0">
-                <a:solidFill>
-                  <a:srgbClr val="BF003F"/>
-                </a:solidFill>
-                <a:latin typeface="Cambria Math" panose="02040503050406030204" pitchFamily="18" charset="0"/>
-                <a:ea typeface="Cambria Math" panose="02040503050406030204" pitchFamily="18" charset="0"/>
-                <a:cs typeface="Calibri"/>
-              </a:rPr>
-              <a:t>Pending</a:t>
-            </a:r>
-            <a:r>
-              <a:rPr sz="1100" b="1" spc="185" dirty="0">
-                <a:solidFill>
-                  <a:srgbClr val="BF003F"/>
-                </a:solidFill>
-                <a:latin typeface="Cambria Math" panose="02040503050406030204" pitchFamily="18" charset="0"/>
-                <a:ea typeface="Cambria Math" panose="02040503050406030204" pitchFamily="18" charset="0"/>
-                <a:cs typeface="Calibri"/>
-              </a:rPr>
-              <a:t> </a:t>
-            </a:r>
-            <a:r>
-              <a:rPr sz="1100" b="1" spc="95" dirty="0">
-                <a:solidFill>
-                  <a:srgbClr val="BF003F"/>
-                </a:solidFill>
-                <a:latin typeface="Cambria Math" panose="02040503050406030204" pitchFamily="18" charset="0"/>
-                <a:ea typeface="Cambria Math" panose="02040503050406030204" pitchFamily="18" charset="0"/>
-                <a:cs typeface="Calibri"/>
-              </a:rPr>
-              <a:t>Work</a:t>
-            </a:r>
-            <a:endParaRPr sz="1100" dirty="0">
-              <a:latin typeface="Cambria Math" panose="02040503050406030204" pitchFamily="18" charset="0"/>
-              <a:ea typeface="Cambria Math" panose="02040503050406030204" pitchFamily="18" charset="0"/>
-              <a:cs typeface="Calibri"/>
-            </a:endParaRPr>
-          </a:p>
-        </p:txBody>
-      </p:sp>
-      <p:sp>
-        <p:nvSpPr>
-          <p:cNvPr id="8" name="object 8"/>
-          <p:cNvSpPr/>
-          <p:nvPr/>
-        </p:nvSpPr>
-        <p:spPr>
-          <a:xfrm>
-            <a:off x="0" y="3275998"/>
-            <a:ext cx="4608195" cy="0"/>
-          </a:xfrm>
-          <a:custGeom>
-            <a:avLst/>
-            <a:gdLst/>
-            <a:ahLst/>
-            <a:cxnLst/>
-            <a:rect l="l" t="t" r="r" b="b"/>
-            <a:pathLst>
-              <a:path w="4608195">
-                <a:moveTo>
-                  <a:pt x="0" y="0"/>
-                </a:moveTo>
-                <a:lnTo>
-                  <a:pt x="4608060" y="0"/>
-                </a:lnTo>
-              </a:path>
-            </a:pathLst>
-          </a:custGeom>
-          <a:ln w="15183">
-            <a:solidFill>
-              <a:srgbClr val="001F44"/>
-            </a:solidFill>
-          </a:ln>
-        </p:spPr>
-        <p:txBody>
-          <a:bodyPr wrap="square" lIns="0" tIns="0" rIns="0" bIns="0" rtlCol="0"/>
-          <a:lstStyle/>
-          <a:p>
-            <a:endParaRPr/>
-          </a:p>
-        </p:txBody>
-      </p:sp>
-    </p:spTree>
-  </p:cSld>
-  <p:clrMapOvr>
-    <a:masterClrMapping/>
-  </p:clrMapOvr>
-  <p:transition>
-    <p:cut/>
-  </p:transition>
-</p:sld>
-</file>
-
-<file path=ppt/slides/slide20.xml><?xml version="1.0" encoding="utf-8"?>
+<file path=ppt/slides/slide21.xml><?xml version="1.0" encoding="utf-8"?>
 <p:sld xmlns:a="http://schemas.openxmlformats.org/drawingml/2006/main" xmlns:r="http://schemas.openxmlformats.org/officeDocument/2006/relationships" xmlns:p="http://schemas.openxmlformats.org/presentationml/2006/main">
   <p:cSld>
     <p:spTree>
@@ -5945,7 +6264,7 @@
 </p:sld>
 </file>
 
-<file path=ppt/slides/slide21.xml><?xml version="1.0" encoding="utf-8"?>
+<file path=ppt/slides/slide22.xml><?xml version="1.0" encoding="utf-8"?>
 <p:sld xmlns:a="http://schemas.openxmlformats.org/drawingml/2006/main" xmlns:r="http://schemas.openxmlformats.org/officeDocument/2006/relationships" xmlns:p="http://schemas.openxmlformats.org/presentationml/2006/main">
   <p:cSld>
     <p:spTree>
@@ -6259,7 +6578,7 @@
 </p:sld>
 </file>
 
-<file path=ppt/slides/slide22.xml><?xml version="1.0" encoding="utf-8"?>
+<file path=ppt/slides/slide23.xml><?xml version="1.0" encoding="utf-8"?>
 <p:sld xmlns:a="http://schemas.openxmlformats.org/drawingml/2006/main" xmlns:r="http://schemas.openxmlformats.org/officeDocument/2006/relationships" xmlns:p="http://schemas.openxmlformats.org/presentationml/2006/main" showMasterSp="0">
   <p:cSld>
     <p:spTree>
@@ -6487,7 +6806,7 @@
 </p:sld>
 </file>
 
-<file path=ppt/slides/slide23.xml><?xml version="1.0" encoding="utf-8"?>
+<file path=ppt/slides/slide24.xml><?xml version="1.0" encoding="utf-8"?>
 <p:sld xmlns:a="http://schemas.openxmlformats.org/drawingml/2006/main" xmlns:r="http://schemas.openxmlformats.org/officeDocument/2006/relationships" xmlns:p="http://schemas.openxmlformats.org/presentationml/2006/main" showMasterSp="0">
   <p:cSld>
     <p:spTree>
@@ -7235,7 +7554,7 @@
 </p:sld>
 </file>
 
-<file path=ppt/slides/slide24.xml><?xml version="1.0" encoding="utf-8"?>
+<file path=ppt/slides/slide25.xml><?xml version="1.0" encoding="utf-8"?>
 <p:sld xmlns:a="http://schemas.openxmlformats.org/drawingml/2006/main" xmlns:r="http://schemas.openxmlformats.org/officeDocument/2006/relationships" xmlns:p="http://schemas.openxmlformats.org/presentationml/2006/main" showMasterSp="0">
   <p:cSld>
     <p:spTree>
@@ -7691,7 +8010,7 @@
 </p:sld>
 </file>
 
-<file path=ppt/slides/slide25.xml><?xml version="1.0" encoding="utf-8"?>
+<file path=ppt/slides/slide26.xml><?xml version="1.0" encoding="utf-8"?>
 <p:sld xmlns:a="http://schemas.openxmlformats.org/drawingml/2006/main" xmlns:r="http://schemas.openxmlformats.org/officeDocument/2006/relationships" xmlns:p="http://schemas.openxmlformats.org/presentationml/2006/main" showMasterSp="0">
   <p:cSld>
     <p:spTree>
